--- a/dist/초1/수학/수와연산/초1_수학_수와연산_05_뺄셈의뜻_학생용.pptx
+++ b/dist/초1/수학/수와연산/초1_수학_수와연산_05_뺄셈의뜻_학생용.pptx
@@ -119,13 +119,13 @@
   <p:extLst>
     <p:ext uri="{521415D9-36F7-43E2-AB2F-B90AF26B5E84}">
       <p14:sectionLst xmlns:p14="http://schemas.microsoft.com/office/powerpoint/2010/main">
-        <p14:section name="도입" id="{ccd4bff0-abc3-361f-529e-d81d2a766be0}">
+        <p14:section name="도입" id="{4b861878-90c6-78bf-daff-9bf53692663a}">
           <p14:sldIdLst>
             <p14:sldId id="256"/>
             <p14:sldId id="257"/>
           </p14:sldIdLst>
         </p14:section>
-        <p14:section name="개념" id="{4c681081-5787-89ac-d717-401db5cd1f48}">
+        <p14:section name="개념" id="{1131476b-e2c3-a6a3-0383-99c34712e8e8}">
           <p14:sldIdLst>
             <p14:sldId id="258"/>
             <p14:sldId id="259"/>
@@ -133,25 +133,25 @@
             <p14:sldId id="261"/>
           </p14:sldIdLst>
         </p14:section>
-        <p14:section name="연습" id="{b1950ae6-a8a2-eb46-3670-d4d5b77a42bb}">
+        <p14:section name="연습" id="{7ea223b8-e4a7-6a97-60ad-e6a03b313859}">
           <p14:sldIdLst>
             <p14:sldId id="262"/>
             <p14:sldId id="263"/>
             <p14:sldId id="264"/>
           </p14:sldIdLst>
         </p14:section>
-        <p14:section name="확인" id="{7d250af3-7084-d60b-fb6b-283bc2629b2e}">
+        <p14:section name="확인" id="{8a7dcaed-977c-a942-099a-9447a6c242fc}">
           <p14:sldIdLst>
             <p14:sldId id="265"/>
             <p14:sldId id="266"/>
           </p14:sldIdLst>
         </p14:section>
-        <p14:section name="정리" id="{7d66bb68-5136-0681-d242-cb4b3232043a}">
+        <p14:section name="정리" id="{44674033-dcba-0c4a-2f5b-a63dca7fecc8}">
           <p14:sldIdLst>
             <p14:sldId id="267"/>
           </p14:sldIdLst>
         </p14:section>
-        <p14:section name="보충" id="{df3aabc4-3a2c-29f1-b952-10744cf6699a}">
+        <p14:section name="보충" id="{23a9045d-1819-658c-c588-fb6224eb36f1}">
           <p14:sldIdLst>
             <p14:sldId id="268"/>
           </p14:sldIdLst>
@@ -2695,7 +2695,7 @@
           <a:bodyPr wrap="square" lIns="0" tIns="0" rIns="0" bIns="0" rtlCol="0" anchor="ctr"/>
           <a:lstStyle/>
           <a:p>
-            <a:pPr algn="l" indent="0" marL="0">
+            <a:pPr eaLnBrk="0" algn="l" indent="0" marL="0">
               <a:buNone/>
             </a:pPr>
             <a:r>
@@ -2736,7 +2736,7 @@
           <a:bodyPr wrap="square" lIns="0" tIns="0" rIns="0" bIns="0" rtlCol="0" anchor="t"/>
           <a:lstStyle/>
           <a:p>
-            <a:pPr indent="0" marL="0">
+            <a:pPr eaLnBrk="0" indent="0" marL="0">
               <a:buNone/>
             </a:pPr>
             <a:r>
@@ -3131,7 +3131,7 @@
       </p:sp>
       <p:sp>
         <p:nvSpPr>
-          <p:cNvPr id="19" name="S01-figure16" descr="십 칸 틀에 5개"/>
+          <p:cNvPr id="19" name="S01-figure16" descr="1개의 십 칸 틀 중 1번째: 모두 5개"/>
           <p:cNvSpPr/>
           <p:nvPr/>
         </p:nvSpPr>
@@ -3483,7 +3483,7 @@
       </p:sp>
       <p:sp>
         <p:nvSpPr>
-          <p:cNvPr id="33" name="S01-figure30" descr="십 칸 틀에 3개"/>
+          <p:cNvPr id="33" name="S01-figure30" descr="1개의 십 칸 틀 중 1번째: 모두 3개"/>
           <p:cNvSpPr/>
           <p:nvPr/>
         </p:nvSpPr>
@@ -3556,7 +3556,7 @@
           <a:bodyPr wrap="square" lIns="0" tIns="0" rIns="0" bIns="0" rtlCol="0" anchor="ctr"/>
           <a:lstStyle/>
           <a:p>
-            <a:pPr indent="0" marL="0">
+            <a:pPr eaLnBrk="0" indent="0" marL="0">
               <a:spcAft>
                 <a:spcPts val="600"/>
               </a:spcAft>
@@ -3576,7 +3576,7 @@
             <a:endParaRPr lang="ko-KR" sz="3200" dirty="0"/>
           </a:p>
           <a:p>
-            <a:pPr indent="0" marL="0">
+            <a:pPr eaLnBrk="0" indent="0" marL="0">
               <a:spcAft>
                 <a:spcPts val="600"/>
               </a:spcAft>
@@ -3596,7 +3596,7 @@
             <a:endParaRPr lang="ko-KR" sz="3200" dirty="0"/>
           </a:p>
           <a:p>
-            <a:pPr indent="0" marL="0">
+            <a:pPr eaLnBrk="0" indent="0" marL="0">
               <a:spcAft>
                 <a:spcPts val="600"/>
               </a:spcAft>
@@ -3665,7 +3665,7 @@
           <a:bodyPr wrap="square" lIns="0" tIns="0" rIns="0" bIns="0" rtlCol="0" anchor="ctr"/>
           <a:lstStyle/>
           <a:p>
-            <a:pPr algn="l" indent="0" marL="0">
+            <a:pPr eaLnBrk="0" algn="l" indent="0" marL="0">
               <a:buNone/>
             </a:pPr>
             <a:r>
@@ -3704,7 +3704,7 @@
           <a:bodyPr wrap="square" lIns="0" tIns="0" rIns="0" bIns="0" rtlCol="0" anchor="ctr"/>
           <a:lstStyle/>
           <a:p>
-            <a:pPr algn="l" indent="0" marL="0">
+            <a:pPr eaLnBrk="0" algn="l" indent="0" marL="0">
               <a:buNone/>
             </a:pPr>
             <a:r>
@@ -3751,7 +3751,7 @@
           <a:bodyPr wrap="square" lIns="0" tIns="0" rIns="0" bIns="0" rtlCol="0" anchor="ctr"/>
           <a:lstStyle/>
           <a:p>
-            <a:pPr algn="ctr" indent="0" marL="0">
+            <a:pPr eaLnBrk="0" algn="ctr" indent="0" marL="0">
               <a:buNone/>
             </a:pPr>
             <a:r>
@@ -3790,7 +3790,7 @@
           <a:bodyPr wrap="square" lIns="0" tIns="0" rIns="0" bIns="0" rtlCol="0" anchor="ctr"/>
           <a:lstStyle/>
           <a:p>
-            <a:pPr algn="l" indent="0" marL="0">
+            <a:pPr eaLnBrk="0" algn="l" indent="0" marL="0">
               <a:buNone/>
             </a:pPr>
             <a:r>
@@ -3837,7 +3837,7 @@
           <a:bodyPr wrap="square" lIns="0" tIns="0" rIns="0" bIns="0" rtlCol="0" anchor="ctr"/>
           <a:lstStyle/>
           <a:p>
-            <a:pPr algn="ctr" indent="0" marL="0">
+            <a:pPr eaLnBrk="0" algn="ctr" indent="0" marL="0">
               <a:buNone/>
             </a:pPr>
             <a:r>
@@ -3876,7 +3876,7 @@
           <a:bodyPr wrap="square" lIns="0" tIns="0" rIns="0" bIns="0" rtlCol="0" anchor="ctr"/>
           <a:lstStyle/>
           <a:p>
-            <a:pPr algn="l" indent="0" marL="0">
+            <a:pPr eaLnBrk="0" algn="l" indent="0" marL="0">
               <a:buNone/>
             </a:pPr>
             <a:r>
@@ -3923,7 +3923,7 @@
           <a:bodyPr wrap="square" lIns="0" tIns="0" rIns="0" bIns="0" rtlCol="0" anchor="ctr"/>
           <a:lstStyle/>
           <a:p>
-            <a:pPr algn="ctr" indent="0" marL="0">
+            <a:pPr eaLnBrk="0" algn="ctr" indent="0" marL="0">
               <a:buNone/>
             </a:pPr>
             <a:r>
@@ -3962,7 +3962,7 @@
           <a:bodyPr wrap="square" lIns="0" tIns="0" rIns="0" bIns="0" rtlCol="0" anchor="ctr"/>
           <a:lstStyle/>
           <a:p>
-            <a:pPr algn="l" indent="0" marL="0">
+            <a:pPr eaLnBrk="0" algn="l" indent="0" marL="0">
               <a:buNone/>
             </a:pPr>
             <a:r>
@@ -4019,7 +4019,7 @@
             </a:lvl1pPr>
           </a:lstStyle>
           <a:p>
-            <a:pPr algn="r"/>
+            <a:pPr eaLnBrk="0" algn="r"/>
             <a:fld id="{F7021451-1387-4CA6-816F-3879F97B5CBC}" type="slidenum">
               <a:rPr b="0" lang="en-US"/>
               <a:t>10</a:t>
@@ -4076,7 +4076,7 @@
           <a:bodyPr wrap="square" lIns="0" tIns="0" rIns="0" bIns="0" rtlCol="0" anchor="ctr"/>
           <a:lstStyle/>
           <a:p>
-            <a:pPr algn="l" indent="0" marL="0">
+            <a:pPr eaLnBrk="0" algn="l" indent="0" marL="0">
               <a:buNone/>
             </a:pPr>
             <a:r>
@@ -4115,7 +4115,7 @@
           <a:bodyPr wrap="square" lIns="0" tIns="0" rIns="0" bIns="0" rtlCol="0" anchor="ctr"/>
           <a:lstStyle/>
           <a:p>
-            <a:pPr algn="l" indent="0" marL="0">
+            <a:pPr eaLnBrk="0" algn="l" indent="0" marL="0">
               <a:buNone/>
             </a:pPr>
             <a:r>
@@ -4181,7 +4181,7 @@
           <a:bodyPr wrap="square" lIns="0" tIns="0" rIns="0" bIns="0" rtlCol="0" anchor="ctr"/>
           <a:lstStyle/>
           <a:p>
-            <a:pPr indent="0" marL="0">
+            <a:pPr eaLnBrk="0" indent="0" marL="0">
               <a:spcAft>
                 <a:spcPts val="600"/>
               </a:spcAft>
@@ -4231,7 +4231,7 @@
           <a:bodyPr wrap="square" lIns="0" tIns="0" rIns="0" bIns="0" rtlCol="0" anchor="ctr"/>
           <a:lstStyle/>
           <a:p>
-            <a:pPr algn="ctr" indent="0" marL="0">
+            <a:pPr eaLnBrk="0" algn="ctr" indent="0" marL="0">
               <a:buNone/>
             </a:pPr>
             <a:r>
@@ -4297,7 +4297,7 @@
           <a:bodyPr wrap="square" lIns="0" tIns="0" rIns="0" bIns="0" rtlCol="0" anchor="ctr"/>
           <a:lstStyle/>
           <a:p>
-            <a:pPr indent="0" marL="0">
+            <a:pPr eaLnBrk="0" indent="0" marL="0">
               <a:spcAft>
                 <a:spcPts val="600"/>
               </a:spcAft>
@@ -4347,7 +4347,7 @@
           <a:bodyPr wrap="square" lIns="0" tIns="0" rIns="0" bIns="0" rtlCol="0" anchor="ctr"/>
           <a:lstStyle/>
           <a:p>
-            <a:pPr algn="ctr" indent="0" marL="0">
+            <a:pPr eaLnBrk="0" algn="ctr" indent="0" marL="0">
               <a:buNone/>
             </a:pPr>
             <a:r>
@@ -4413,7 +4413,7 @@
           <a:bodyPr wrap="square" lIns="0" tIns="0" rIns="0" bIns="0" rtlCol="0" anchor="ctr"/>
           <a:lstStyle/>
           <a:p>
-            <a:pPr indent="0" marL="0">
+            <a:pPr eaLnBrk="0" indent="0" marL="0">
               <a:spcAft>
                 <a:spcPts val="600"/>
               </a:spcAft>
@@ -4463,7 +4463,7 @@
           <a:bodyPr wrap="square" lIns="0" tIns="0" rIns="0" bIns="0" rtlCol="0" anchor="ctr"/>
           <a:lstStyle/>
           <a:p>
-            <a:pPr algn="ctr" indent="0" marL="0">
+            <a:pPr eaLnBrk="0" algn="ctr" indent="0" marL="0">
               <a:buNone/>
             </a:pPr>
             <a:r>
@@ -4529,7 +4529,7 @@
           <a:bodyPr wrap="square" lIns="0" tIns="0" rIns="0" bIns="0" rtlCol="0" anchor="ctr"/>
           <a:lstStyle/>
           <a:p>
-            <a:pPr indent="0" marL="0">
+            <a:pPr eaLnBrk="0" indent="0" marL="0">
               <a:spcAft>
                 <a:spcPts val="600"/>
               </a:spcAft>
@@ -4589,7 +4589,7 @@
             </a:lvl1pPr>
           </a:lstStyle>
           <a:p>
-            <a:pPr algn="r"/>
+            <a:pPr eaLnBrk="0" algn="r"/>
             <a:fld id="{F7021451-1387-4CA6-816F-3879F97B5CBC}" type="slidenum">
               <a:rPr b="0" lang="en-US"/>
               <a:t>11</a:t>
@@ -4646,7 +4646,7 @@
           <a:bodyPr wrap="square" lIns="0" tIns="0" rIns="0" bIns="0" rtlCol="0" anchor="ctr"/>
           <a:lstStyle/>
           <a:p>
-            <a:pPr algn="l" indent="0" marL="0">
+            <a:pPr eaLnBrk="0" algn="l" indent="0" marL="0">
               <a:buNone/>
             </a:pPr>
             <a:r>
@@ -4712,7 +4712,7 @@
           <a:bodyPr wrap="square" lIns="0" tIns="0" rIns="0" bIns="0" rtlCol="0" anchor="ctr"/>
           <a:lstStyle/>
           <a:p>
-            <a:pPr indent="0" marL="0">
+            <a:pPr eaLnBrk="0" indent="0" marL="0">
               <a:spcAft>
                 <a:spcPts val="600"/>
               </a:spcAft>
@@ -4762,7 +4762,7 @@
           <a:bodyPr wrap="square" lIns="177800" tIns="0" rIns="177800" bIns="0" rtlCol="0" anchor="ctr"/>
           <a:lstStyle/>
           <a:p>
-            <a:pPr algn="l" indent="0" marL="0">
+            <a:pPr eaLnBrk="0" algn="l" indent="0" marL="0">
               <a:buNone/>
             </a:pPr>
             <a:r>
@@ -4809,7 +4809,7 @@
           <a:bodyPr wrap="square" lIns="177800" tIns="0" rIns="177800" bIns="0" rtlCol="0" anchor="ctr"/>
           <a:lstStyle/>
           <a:p>
-            <a:pPr algn="l" indent="0" marL="0">
+            <a:pPr eaLnBrk="0" algn="l" indent="0" marL="0">
               <a:buNone/>
             </a:pPr>
             <a:r>
@@ -4848,7 +4848,7 @@
           <a:bodyPr wrap="square" lIns="0" tIns="0" rIns="0" bIns="0" rtlCol="0" anchor="t"/>
           <a:lstStyle/>
           <a:p>
-            <a:pPr algn="l" indent="0" marL="0">
+            <a:pPr eaLnBrk="0" algn="l" indent="0" marL="0">
               <a:buNone/>
             </a:pPr>
             <a:r>
@@ -4887,7 +4887,7 @@
           <a:bodyPr wrap="square" lIns="0" tIns="0" rIns="0" bIns="0" rtlCol="0" anchor="ctr"/>
           <a:lstStyle/>
           <a:p>
-            <a:pPr algn="l" indent="0" marL="0">
+            <a:pPr eaLnBrk="0" algn="l" indent="0" marL="0">
               <a:buNone/>
             </a:pPr>
             <a:r>
@@ -4926,7 +4926,7 @@
           <a:bodyPr wrap="square" lIns="0" tIns="0" rIns="0" bIns="0" rtlCol="0" anchor="ctr"/>
           <a:lstStyle/>
           <a:p>
-            <a:pPr algn="l" indent="0" marL="0">
+            <a:pPr eaLnBrk="0" algn="l" indent="0" marL="0">
               <a:buNone/>
             </a:pPr>
             <a:r>
@@ -4965,7 +4965,7 @@
           <a:bodyPr wrap="square" lIns="0" tIns="0" rIns="0" bIns="0" rtlCol="0" anchor="ctr"/>
           <a:lstStyle/>
           <a:p>
-            <a:pPr algn="l" indent="0" marL="0">
+            <a:pPr eaLnBrk="0" algn="l" indent="0" marL="0">
               <a:buNone/>
             </a:pPr>
             <a:r>
@@ -5004,7 +5004,7 @@
           <a:bodyPr wrap="square" lIns="0" tIns="0" rIns="0" bIns="0" rtlCol="0" anchor="ctr"/>
           <a:lstStyle/>
           <a:p>
-            <a:pPr algn="l" indent="0" marL="0">
+            <a:pPr eaLnBrk="0" algn="l" indent="0" marL="0">
               <a:buNone/>
             </a:pPr>
             <a:r>
@@ -5061,7 +5061,7 @@
             </a:lvl1pPr>
           </a:lstStyle>
           <a:p>
-            <a:pPr algn="r"/>
+            <a:pPr eaLnBrk="0" algn="r"/>
             <a:fld id="{F7021451-1387-4CA6-816F-3879F97B5CBC}" type="slidenum">
               <a:rPr b="0" lang="en-US"/>
               <a:t>12</a:t>
@@ -5118,7 +5118,7 @@
           <a:bodyPr wrap="square" lIns="0" tIns="0" rIns="0" bIns="0" rtlCol="0" anchor="ctr"/>
           <a:lstStyle/>
           <a:p>
-            <a:pPr algn="l" indent="0" marL="0">
+            <a:pPr eaLnBrk="0" algn="l" indent="0" marL="0">
               <a:buNone/>
             </a:pPr>
             <a:r>
@@ -5157,7 +5157,7 @@
           <a:bodyPr wrap="square" lIns="0" tIns="0" rIns="0" bIns="0" rtlCol="0" anchor="ctr"/>
           <a:lstStyle/>
           <a:p>
-            <a:pPr algn="l" indent="0" marL="0">
+            <a:pPr eaLnBrk="0" algn="l" indent="0" marL="0">
               <a:buNone/>
             </a:pPr>
             <a:r>
@@ -5223,7 +5223,7 @@
           <a:bodyPr wrap="square" lIns="0" tIns="0" rIns="0" bIns="0" rtlCol="0" anchor="ctr"/>
           <a:lstStyle/>
           <a:p>
-            <a:pPr indent="0" marL="0">
+            <a:pPr eaLnBrk="0" indent="0" marL="0">
               <a:spcAft>
                 <a:spcPts val="600"/>
               </a:spcAft>
@@ -5344,7 +5344,7 @@
           <a:bodyPr wrap="square" lIns="0" tIns="0" rIns="0" bIns="0" rtlCol="0" anchor="ctr"/>
           <a:lstStyle/>
           <a:p>
-            <a:pPr algn="ctr" indent="0" marL="0">
+            <a:pPr eaLnBrk="0" algn="ctr" indent="0" marL="0">
               <a:buNone/>
             </a:pPr>
             <a:r>
@@ -5512,7 +5512,7 @@
           <a:bodyPr wrap="square" lIns="0" tIns="0" rIns="0" bIns="0" rtlCol="0" anchor="ctr"/>
           <a:lstStyle/>
           <a:p>
-            <a:pPr algn="ctr" indent="0" marL="0">
+            <a:pPr eaLnBrk="0" algn="ctr" indent="0" marL="0">
               <a:buNone/>
             </a:pPr>
             <a:r>
@@ -5569,7 +5569,7 @@
             </a:lvl1pPr>
           </a:lstStyle>
           <a:p>
-            <a:pPr algn="r"/>
+            <a:pPr eaLnBrk="0" algn="r"/>
             <a:fld id="{F7021451-1387-4CA6-816F-3879F97B5CBC}" type="slidenum">
               <a:rPr b="0" lang="en-US"/>
               <a:t>13</a:t>
@@ -5626,7 +5626,7 @@
           <a:bodyPr wrap="square" lIns="0" tIns="0" rIns="0" bIns="0" rtlCol="0" anchor="ctr"/>
           <a:lstStyle/>
           <a:p>
-            <a:pPr algn="l" indent="0" marL="0">
+            <a:pPr eaLnBrk="0" algn="l" indent="0" marL="0">
               <a:buNone/>
             </a:pPr>
             <a:r>
@@ -5673,7 +5673,7 @@
           <a:bodyPr wrap="square" lIns="0" tIns="0" rIns="0" bIns="0" rtlCol="0" anchor="ctr"/>
           <a:lstStyle/>
           <a:p>
-            <a:pPr algn="ctr" indent="0" marL="0">
+            <a:pPr eaLnBrk="0" algn="ctr" indent="0" marL="0">
               <a:buNone/>
             </a:pPr>
             <a:r>
@@ -5712,7 +5712,7 @@
           <a:bodyPr wrap="square" lIns="0" tIns="0" rIns="0" bIns="0" rtlCol="0" anchor="ctr"/>
           <a:lstStyle/>
           <a:p>
-            <a:pPr algn="l" indent="0" marL="0">
+            <a:pPr eaLnBrk="0" algn="l" indent="0" marL="0">
               <a:buNone/>
             </a:pPr>
             <a:r>
@@ -5759,7 +5759,7 @@
           <a:bodyPr wrap="square" lIns="0" tIns="0" rIns="0" bIns="0" rtlCol="0" anchor="ctr"/>
           <a:lstStyle/>
           <a:p>
-            <a:pPr algn="ctr" indent="0" marL="0">
+            <a:pPr eaLnBrk="0" algn="ctr" indent="0" marL="0">
               <a:buNone/>
             </a:pPr>
             <a:r>
@@ -5798,7 +5798,7 @@
           <a:bodyPr wrap="square" lIns="0" tIns="0" rIns="0" bIns="0" rtlCol="0" anchor="ctr"/>
           <a:lstStyle/>
           <a:p>
-            <a:pPr algn="l" indent="0" marL="0">
+            <a:pPr eaLnBrk="0" algn="l" indent="0" marL="0">
               <a:buNone/>
             </a:pPr>
             <a:r>
@@ -5845,7 +5845,7 @@
           <a:bodyPr wrap="square" lIns="0" tIns="0" rIns="0" bIns="0" rtlCol="0" anchor="ctr"/>
           <a:lstStyle/>
           <a:p>
-            <a:pPr algn="ctr" indent="0" marL="0">
+            <a:pPr eaLnBrk="0" algn="ctr" indent="0" marL="0">
               <a:buNone/>
             </a:pPr>
             <a:r>
@@ -5884,7 +5884,7 @@
           <a:bodyPr wrap="square" lIns="0" tIns="0" rIns="0" bIns="0" rtlCol="0" anchor="ctr"/>
           <a:lstStyle/>
           <a:p>
-            <a:pPr algn="ctr" indent="0" marL="0">
+            <a:pPr eaLnBrk="0" algn="ctr" indent="0" marL="0">
               <a:buNone/>
             </a:pPr>
             <a:r>
@@ -5901,7 +5901,7 @@
             <a:endParaRPr lang="ko-KR" sz="2600" dirty="0"/>
           </a:p>
           <a:p>
-            <a:pPr algn="ctr" indent="0" marL="0">
+            <a:pPr eaLnBrk="0" algn="ctr" indent="0" marL="0">
               <a:buNone/>
             </a:pPr>
             <a:r>
@@ -5918,7 +5918,7 @@
             <a:endParaRPr lang="ko-KR" sz="2600" dirty="0"/>
           </a:p>
           <a:p>
-            <a:pPr algn="ctr" indent="0" marL="0">
+            <a:pPr eaLnBrk="0" algn="ctr" indent="0" marL="0">
               <a:buNone/>
             </a:pPr>
             <a:r>
@@ -5975,7 +5975,7 @@
             </a:lvl1pPr>
           </a:lstStyle>
           <a:p>
-            <a:pPr algn="r"/>
+            <a:pPr eaLnBrk="0" algn="r"/>
             <a:fld id="{F7021451-1387-4CA6-816F-3879F97B5CBC}" type="slidenum">
               <a:rPr b="0" lang="en-US"/>
               <a:t>2</a:t>
@@ -6032,7 +6032,7 @@
           <a:bodyPr wrap="square" lIns="0" tIns="0" rIns="0" bIns="0" rtlCol="0" anchor="ctr"/>
           <a:lstStyle/>
           <a:p>
-            <a:pPr algn="l" indent="0" marL="0">
+            <a:pPr eaLnBrk="0" algn="l" indent="0" marL="0">
               <a:buNone/>
             </a:pPr>
             <a:r>
@@ -6071,7 +6071,7 @@
           <a:bodyPr wrap="square" lIns="0" tIns="0" rIns="0" bIns="0" rtlCol="0" anchor="ctr"/>
           <a:lstStyle/>
           <a:p>
-            <a:pPr algn="l" indent="0" marL="0">
+            <a:pPr eaLnBrk="0" algn="l" indent="0" marL="0">
               <a:buNone/>
             </a:pPr>
             <a:r>
@@ -6137,7 +6137,7 @@
           <a:bodyPr wrap="square" lIns="0" tIns="0" rIns="0" bIns="0" rtlCol="0" anchor="ctr"/>
           <a:lstStyle/>
           <a:p>
-            <a:pPr indent="0" marL="0">
+            <a:pPr eaLnBrk="0" indent="0" marL="0">
               <a:spcAft>
                 <a:spcPts val="600"/>
               </a:spcAft>
@@ -6157,7 +6157,7 @@
             <a:endParaRPr lang="ko-KR" sz="3200" dirty="0"/>
           </a:p>
           <a:p>
-            <a:pPr indent="0" marL="0">
+            <a:pPr eaLnBrk="0" indent="0" marL="0">
               <a:spcAft>
                 <a:spcPts val="600"/>
               </a:spcAft>
@@ -6555,7 +6555,7 @@
       </p:sp>
       <p:sp>
         <p:nvSpPr>
-          <p:cNvPr id="21" name="S03-figure57" descr="십 칸 틀에 5개"/>
+          <p:cNvPr id="21" name="S03-figure57" descr="1개의 십 칸 틀 중 1번째: 모두 5개"/>
           <p:cNvSpPr/>
           <p:nvPr/>
         </p:nvSpPr>
@@ -6601,7 +6601,7 @@
           <a:bodyPr wrap="square" lIns="0" tIns="0" rIns="0" bIns="0" rtlCol="0" anchor="ctr"/>
           <a:lstStyle/>
           <a:p>
-            <a:pPr algn="ctr" indent="0" marL="0">
+            <a:pPr eaLnBrk="0" algn="ctr" indent="0" marL="0">
               <a:buNone/>
             </a:pPr>
             <a:r>
@@ -6946,7 +6946,7 @@
       </p:sp>
       <p:sp>
         <p:nvSpPr>
-          <p:cNvPr id="36" name="S03-figure72" descr="십 칸 틀에 3개"/>
+          <p:cNvPr id="36" name="S03-figure72" descr="1개의 십 칸 틀 중 1번째: 모두 3개"/>
           <p:cNvSpPr/>
           <p:nvPr/>
         </p:nvSpPr>
@@ -6992,7 +6992,7 @@
           <a:bodyPr wrap="square" lIns="0" tIns="0" rIns="0" bIns="0" rtlCol="0" anchor="ctr"/>
           <a:lstStyle/>
           <a:p>
-            <a:pPr algn="ctr" indent="0" marL="0">
+            <a:pPr eaLnBrk="0" algn="ctr" indent="0" marL="0">
               <a:buNone/>
             </a:pPr>
             <a:r>
@@ -7049,7 +7049,7 @@
             </a:lvl1pPr>
           </a:lstStyle>
           <a:p>
-            <a:pPr algn="r"/>
+            <a:pPr eaLnBrk="0" algn="r"/>
             <a:fld id="{F7021451-1387-4CA6-816F-3879F97B5CBC}" type="slidenum">
               <a:rPr b="0" lang="en-US"/>
               <a:t>3</a:t>
@@ -7106,7 +7106,7 @@
           <a:bodyPr wrap="square" lIns="0" tIns="0" rIns="0" bIns="0" rtlCol="0" anchor="ctr"/>
           <a:lstStyle/>
           <a:p>
-            <a:pPr algn="l" indent="0" marL="0">
+            <a:pPr eaLnBrk="0" algn="l" indent="0" marL="0">
               <a:buNone/>
             </a:pPr>
             <a:r>
@@ -7145,7 +7145,7 @@
           <a:bodyPr wrap="square" lIns="0" tIns="0" rIns="0" bIns="0" rtlCol="0" anchor="ctr"/>
           <a:lstStyle/>
           <a:p>
-            <a:pPr algn="l" indent="0" marL="0">
+            <a:pPr eaLnBrk="0" algn="l" indent="0" marL="0">
               <a:buNone/>
             </a:pPr>
             <a:r>
@@ -7211,7 +7211,7 @@
           <a:bodyPr wrap="square" lIns="0" tIns="0" rIns="0" bIns="0" rtlCol="0" anchor="ctr"/>
           <a:lstStyle/>
           <a:p>
-            <a:pPr indent="0" marL="0">
+            <a:pPr eaLnBrk="0" indent="0" marL="0">
               <a:spcAft>
                 <a:spcPts val="600"/>
               </a:spcAft>
@@ -7231,7 +7231,7 @@
             <a:endParaRPr lang="ko-KR" sz="3200" dirty="0"/>
           </a:p>
           <a:p>
-            <a:pPr indent="0" marL="0">
+            <a:pPr eaLnBrk="0" indent="0" marL="0">
               <a:spcAft>
                 <a:spcPts val="600"/>
               </a:spcAft>
@@ -7300,7 +7300,7 @@
           <a:bodyPr wrap="square" lIns="0" tIns="0" rIns="0" bIns="0" rtlCol="0" anchor="ctr"/>
           <a:lstStyle/>
           <a:p>
-            <a:pPr indent="0" marL="0">
+            <a:pPr eaLnBrk="0" indent="0" marL="0">
               <a:spcAft>
                 <a:spcPts val="600"/>
               </a:spcAft>
@@ -7369,7 +7369,7 @@
           <a:bodyPr wrap="square" lIns="0" tIns="0" rIns="0" bIns="0" rtlCol="0" anchor="ctr"/>
           <a:lstStyle/>
           <a:p>
-            <a:pPr indent="0" marL="0">
+            <a:pPr eaLnBrk="0" indent="0" marL="0">
               <a:spcAft>
                 <a:spcPts val="600"/>
               </a:spcAft>
@@ -7756,7 +7756,7 @@
             </a:lvl1pPr>
           </a:lstStyle>
           <a:p>
-            <a:pPr algn="r"/>
+            <a:pPr eaLnBrk="0" algn="r"/>
             <a:fld id="{F7021451-1387-4CA6-816F-3879F97B5CBC}" type="slidenum">
               <a:rPr b="0" lang="en-US"/>
               <a:t>4</a:t>
@@ -7813,7 +7813,7 @@
           <a:bodyPr wrap="square" lIns="0" tIns="0" rIns="0" bIns="0" rtlCol="0" anchor="ctr"/>
           <a:lstStyle/>
           <a:p>
-            <a:pPr algn="l" indent="0" marL="0">
+            <a:pPr eaLnBrk="0" algn="l" indent="0" marL="0">
               <a:buNone/>
             </a:pPr>
             <a:r>
@@ -7852,7 +7852,7 @@
           <a:bodyPr wrap="square" lIns="0" tIns="0" rIns="0" bIns="0" rtlCol="0" anchor="ctr"/>
           <a:lstStyle/>
           <a:p>
-            <a:pPr algn="l" indent="0" marL="0">
+            <a:pPr eaLnBrk="0" algn="l" indent="0" marL="0">
               <a:buNone/>
             </a:pPr>
             <a:r>
@@ -7897,7 +7897,7 @@
           <a:bodyPr wrap="square" lIns="0" tIns="0" rIns="0" bIns="0" rtlCol="0" anchor="ctr"/>
           <a:lstStyle/>
           <a:p>
-            <a:pPr algn="ctr" indent="0" marL="0">
+            <a:pPr eaLnBrk="0" algn="ctr" indent="0" marL="0">
               <a:buNone/>
             </a:pPr>
             <a:r>
@@ -7936,7 +7936,7 @@
           <a:bodyPr wrap="square" lIns="0" tIns="0" rIns="0" bIns="0" rtlCol="0" anchor="t"/>
           <a:lstStyle/>
           <a:p>
-            <a:pPr algn="l" indent="0" marL="0">
+            <a:pPr eaLnBrk="0" algn="l" indent="0" marL="0">
               <a:buNone/>
             </a:pPr>
             <a:r>
@@ -7981,7 +7981,7 @@
           <a:bodyPr wrap="square" lIns="0" tIns="0" rIns="0" bIns="0" rtlCol="0" anchor="ctr"/>
           <a:lstStyle/>
           <a:p>
-            <a:pPr algn="ctr" indent="0" marL="0">
+            <a:pPr eaLnBrk="0" algn="ctr" indent="0" marL="0">
               <a:buNone/>
             </a:pPr>
             <a:r>
@@ -8020,7 +8020,7 @@
           <a:bodyPr wrap="square" lIns="0" tIns="0" rIns="0" bIns="0" rtlCol="0" anchor="t"/>
           <a:lstStyle/>
           <a:p>
-            <a:pPr algn="l" indent="0" marL="0">
+            <a:pPr eaLnBrk="0" algn="l" indent="0" marL="0">
               <a:buNone/>
             </a:pPr>
             <a:r>
@@ -8065,7 +8065,7 @@
           <a:bodyPr wrap="square" lIns="0" tIns="0" rIns="0" bIns="0" rtlCol="0" anchor="ctr"/>
           <a:lstStyle/>
           <a:p>
-            <a:pPr algn="ctr" indent="0" marL="0">
+            <a:pPr eaLnBrk="0" algn="ctr" indent="0" marL="0">
               <a:buNone/>
             </a:pPr>
             <a:r>
@@ -8104,7 +8104,7 @@
           <a:bodyPr wrap="square" lIns="0" tIns="0" rIns="0" bIns="0" rtlCol="0" anchor="t"/>
           <a:lstStyle/>
           <a:p>
-            <a:pPr algn="l" indent="0" marL="0">
+            <a:pPr eaLnBrk="0" algn="l" indent="0" marL="0">
               <a:buNone/>
             </a:pPr>
             <a:r>
@@ -8149,7 +8149,7 @@
           <a:bodyPr wrap="square" lIns="0" tIns="0" rIns="0" bIns="0" rtlCol="0" anchor="ctr"/>
           <a:lstStyle/>
           <a:p>
-            <a:pPr algn="ctr" indent="0" marL="0">
+            <a:pPr eaLnBrk="0" algn="ctr" indent="0" marL="0">
               <a:buNone/>
             </a:pPr>
             <a:r>
@@ -8188,7 +8188,7 @@
           <a:bodyPr wrap="square" lIns="0" tIns="0" rIns="0" bIns="0" rtlCol="0" anchor="t"/>
           <a:lstStyle/>
           <a:p>
-            <a:pPr algn="l" indent="0" marL="0">
+            <a:pPr eaLnBrk="0" algn="l" indent="0" marL="0">
               <a:buNone/>
             </a:pPr>
             <a:r>
@@ -8245,7 +8245,7 @@
             </a:lvl1pPr>
           </a:lstStyle>
           <a:p>
-            <a:pPr algn="r"/>
+            <a:pPr eaLnBrk="0" algn="r"/>
             <a:fld id="{F7021451-1387-4CA6-816F-3879F97B5CBC}" type="slidenum">
               <a:rPr b="0" lang="en-US"/>
               <a:t>5</a:t>
@@ -8302,7 +8302,7 @@
           <a:bodyPr wrap="square" lIns="0" tIns="0" rIns="0" bIns="0" rtlCol="0" anchor="ctr"/>
           <a:lstStyle/>
           <a:p>
-            <a:pPr algn="l" indent="0" marL="0">
+            <a:pPr eaLnBrk="0" algn="l" indent="0" marL="0">
               <a:buNone/>
             </a:pPr>
             <a:r>
@@ -8341,7 +8341,7 @@
           <a:bodyPr wrap="square" lIns="0" tIns="0" rIns="0" bIns="0" rtlCol="0" anchor="ctr"/>
           <a:lstStyle/>
           <a:p>
-            <a:pPr algn="l" indent="0" marL="0">
+            <a:pPr eaLnBrk="0" algn="l" indent="0" marL="0">
               <a:buNone/>
             </a:pPr>
             <a:r>
@@ -8380,7 +8380,7 @@
           <a:bodyPr wrap="square" lIns="0" tIns="0" rIns="0" bIns="0" rtlCol="0" anchor="ctr"/>
           <a:lstStyle/>
           <a:p>
-            <a:pPr algn="ctr" indent="0" marL="0">
+            <a:pPr eaLnBrk="0" algn="ctr" indent="0" marL="0">
               <a:buNone/>
             </a:pPr>
             <a:r>
@@ -8397,7 +8397,7 @@
             <a:endParaRPr lang="ko-KR" sz="3600" dirty="0"/>
           </a:p>
           <a:p>
-            <a:pPr algn="ctr" indent="0" marL="0">
+            <a:pPr eaLnBrk="0" algn="ctr" indent="0" marL="0">
               <a:buNone/>
             </a:pPr>
             <a:r>
@@ -8414,7 +8414,7 @@
             <a:endParaRPr lang="ko-KR" sz="3600" dirty="0"/>
           </a:p>
           <a:p>
-            <a:pPr algn="ctr" indent="0" marL="0">
+            <a:pPr eaLnBrk="0" algn="ctr" indent="0" marL="0">
               <a:buNone/>
             </a:pPr>
             <a:r>
@@ -8459,7 +8459,7 @@
           <a:bodyPr wrap="square" lIns="0" tIns="0" rIns="0" bIns="0" rtlCol="0" anchor="ctr"/>
           <a:lstStyle/>
           <a:p>
-            <a:pPr algn="ctr" indent="0" marL="0">
+            <a:pPr eaLnBrk="0" algn="ctr" indent="0" marL="0">
               <a:buNone/>
             </a:pPr>
             <a:r>
@@ -8498,7 +8498,7 @@
           <a:bodyPr wrap="square" lIns="0" tIns="0" rIns="0" bIns="0" rtlCol="0" anchor="t"/>
           <a:lstStyle/>
           <a:p>
-            <a:pPr algn="l" indent="0" marL="0">
+            <a:pPr eaLnBrk="0" algn="l" indent="0" marL="0">
               <a:buNone/>
             </a:pPr>
             <a:r>
@@ -8543,7 +8543,7 @@
           <a:bodyPr wrap="square" lIns="0" tIns="0" rIns="0" bIns="0" rtlCol="0" anchor="ctr"/>
           <a:lstStyle/>
           <a:p>
-            <a:pPr algn="ctr" indent="0" marL="0">
+            <a:pPr eaLnBrk="0" algn="ctr" indent="0" marL="0">
               <a:buNone/>
             </a:pPr>
             <a:r>
@@ -8582,7 +8582,7 @@
           <a:bodyPr wrap="square" lIns="0" tIns="0" rIns="0" bIns="0" rtlCol="0" anchor="t"/>
           <a:lstStyle/>
           <a:p>
-            <a:pPr algn="l" indent="0" marL="0">
+            <a:pPr eaLnBrk="0" algn="l" indent="0" marL="0">
               <a:buNone/>
             </a:pPr>
             <a:r>
@@ -8627,7 +8627,7 @@
           <a:bodyPr wrap="square" lIns="0" tIns="0" rIns="0" bIns="0" rtlCol="0" anchor="ctr"/>
           <a:lstStyle/>
           <a:p>
-            <a:pPr algn="ctr" indent="0" marL="0">
+            <a:pPr eaLnBrk="0" algn="ctr" indent="0" marL="0">
               <a:buNone/>
             </a:pPr>
             <a:r>
@@ -8666,7 +8666,7 @@
           <a:bodyPr wrap="square" lIns="0" tIns="0" rIns="0" bIns="0" rtlCol="0" anchor="t"/>
           <a:lstStyle/>
           <a:p>
-            <a:pPr algn="l" indent="0" marL="0">
+            <a:pPr eaLnBrk="0" algn="l" indent="0" marL="0">
               <a:buNone/>
             </a:pPr>
             <a:r>
@@ -8723,7 +8723,7 @@
             </a:lvl1pPr>
           </a:lstStyle>
           <a:p>
-            <a:pPr algn="r"/>
+            <a:pPr eaLnBrk="0" algn="r"/>
             <a:fld id="{F7021451-1387-4CA6-816F-3879F97B5CBC}" type="slidenum">
               <a:rPr b="0" lang="en-US"/>
               <a:t>6</a:t>
@@ -8780,7 +8780,7 @@
           <a:bodyPr wrap="square" lIns="0" tIns="0" rIns="0" bIns="0" rtlCol="0" anchor="ctr"/>
           <a:lstStyle/>
           <a:p>
-            <a:pPr algn="l" indent="0" marL="0">
+            <a:pPr eaLnBrk="0" algn="l" indent="0" marL="0">
               <a:buNone/>
             </a:pPr>
             <a:r>
@@ -8819,7 +8819,7 @@
           <a:bodyPr wrap="square" lIns="0" tIns="0" rIns="0" bIns="0" rtlCol="0" anchor="ctr"/>
           <a:lstStyle/>
           <a:p>
-            <a:pPr algn="l" indent="0" marL="0">
+            <a:pPr eaLnBrk="0" algn="l" indent="0" marL="0">
               <a:buNone/>
             </a:pPr>
             <a:r>
@@ -8885,7 +8885,7 @@
           <a:bodyPr wrap="square" lIns="0" tIns="0" rIns="0" bIns="0" rtlCol="0" anchor="ctr"/>
           <a:lstStyle/>
           <a:p>
-            <a:pPr indent="0" marL="0">
+            <a:pPr eaLnBrk="0" indent="0" marL="0">
               <a:spcAft>
                 <a:spcPts val="600"/>
               </a:spcAft>
@@ -8935,7 +8935,7 @@
           <a:bodyPr wrap="square" lIns="0" tIns="0" rIns="0" bIns="0" rtlCol="0" anchor="ctr"/>
           <a:lstStyle/>
           <a:p>
-            <a:pPr algn="ctr" indent="0" marL="0">
+            <a:pPr eaLnBrk="0" algn="ctr" indent="0" marL="0">
               <a:buNone/>
             </a:pPr>
             <a:r>
@@ -8974,7 +8974,7 @@
           <a:bodyPr wrap="square" lIns="0" tIns="0" rIns="0" bIns="0" rtlCol="0" anchor="ctr"/>
           <a:lstStyle/>
           <a:p>
-            <a:pPr algn="l" indent="0" marL="0">
+            <a:pPr eaLnBrk="0" algn="l" indent="0" marL="0">
               <a:buNone/>
             </a:pPr>
             <a:r>
@@ -9021,7 +9021,7 @@
           <a:bodyPr wrap="square" lIns="0" tIns="0" rIns="0" bIns="0" rtlCol="0" anchor="ctr"/>
           <a:lstStyle/>
           <a:p>
-            <a:pPr algn="ctr" indent="0" marL="0">
+            <a:pPr eaLnBrk="0" algn="ctr" indent="0" marL="0">
               <a:buNone/>
             </a:pPr>
             <a:r>
@@ -9060,7 +9060,7 @@
           <a:bodyPr wrap="square" lIns="0" tIns="0" rIns="0" bIns="0" rtlCol="0" anchor="ctr"/>
           <a:lstStyle/>
           <a:p>
-            <a:pPr algn="l" indent="0" marL="0">
+            <a:pPr eaLnBrk="0" algn="l" indent="0" marL="0">
               <a:buNone/>
             </a:pPr>
             <a:r>
@@ -9107,7 +9107,7 @@
           <a:bodyPr wrap="square" lIns="0" tIns="0" rIns="0" bIns="0" rtlCol="0" anchor="ctr"/>
           <a:lstStyle/>
           <a:p>
-            <a:pPr algn="ctr" indent="0" marL="0">
+            <a:pPr eaLnBrk="0" algn="ctr" indent="0" marL="0">
               <a:buNone/>
             </a:pPr>
             <a:r>
@@ -9146,7 +9146,7 @@
           <a:bodyPr wrap="square" lIns="0" tIns="0" rIns="0" bIns="0" rtlCol="0" anchor="ctr"/>
           <a:lstStyle/>
           <a:p>
-            <a:pPr algn="l" indent="0" marL="0">
+            <a:pPr eaLnBrk="0" algn="l" indent="0" marL="0">
               <a:buNone/>
             </a:pPr>
             <a:r>
@@ -9203,7 +9203,7 @@
             </a:lvl1pPr>
           </a:lstStyle>
           <a:p>
-            <a:pPr algn="r"/>
+            <a:pPr eaLnBrk="0" algn="r"/>
             <a:fld id="{F7021451-1387-4CA6-816F-3879F97B5CBC}" type="slidenum">
               <a:rPr b="0" lang="en-US"/>
               <a:t>7</a:t>
@@ -9260,7 +9260,7 @@
           <a:bodyPr wrap="square" lIns="0" tIns="0" rIns="0" bIns="0" rtlCol="0" anchor="ctr"/>
           <a:lstStyle/>
           <a:p>
-            <a:pPr algn="l" indent="0" marL="0">
+            <a:pPr eaLnBrk="0" algn="l" indent="0" marL="0">
               <a:buNone/>
             </a:pPr>
             <a:r>
@@ -9326,7 +9326,7 @@
           <a:bodyPr wrap="square" lIns="0" tIns="0" rIns="0" bIns="0" rtlCol="0" anchor="ctr"/>
           <a:lstStyle/>
           <a:p>
-            <a:pPr indent="0" marL="0">
+            <a:pPr eaLnBrk="0" indent="0" marL="0">
               <a:spcAft>
                 <a:spcPts val="600"/>
               </a:spcAft>
@@ -9376,7 +9376,7 @@
           <a:bodyPr wrap="square" lIns="0" tIns="0" rIns="0" bIns="0" rtlCol="0" anchor="ctr"/>
           <a:lstStyle/>
           <a:p>
-            <a:pPr algn="ctr" indent="0" marL="0">
+            <a:pPr eaLnBrk="0" algn="ctr" indent="0" marL="0">
               <a:buNone/>
             </a:pPr>
             <a:r>
@@ -9415,7 +9415,7 @@
           <a:bodyPr wrap="square" lIns="0" tIns="0" rIns="0" bIns="0" rtlCol="0" anchor="ctr"/>
           <a:lstStyle/>
           <a:p>
-            <a:pPr algn="l" indent="0" marL="0">
+            <a:pPr eaLnBrk="0" algn="l" indent="0" marL="0">
               <a:buNone/>
             </a:pPr>
             <a:r>
@@ -9462,7 +9462,7 @@
           <a:bodyPr wrap="square" lIns="0" tIns="0" rIns="0" bIns="0" rtlCol="0" anchor="ctr"/>
           <a:lstStyle/>
           <a:p>
-            <a:pPr algn="ctr" indent="0" marL="0">
+            <a:pPr eaLnBrk="0" algn="ctr" indent="0" marL="0">
               <a:buNone/>
             </a:pPr>
             <a:r>
@@ -9501,7 +9501,7 @@
           <a:bodyPr wrap="square" lIns="0" tIns="0" rIns="0" bIns="0" rtlCol="0" anchor="ctr"/>
           <a:lstStyle/>
           <a:p>
-            <a:pPr algn="l" indent="0" marL="0">
+            <a:pPr eaLnBrk="0" algn="l" indent="0" marL="0">
               <a:buNone/>
             </a:pPr>
             <a:r>
@@ -9548,7 +9548,7 @@
           <a:bodyPr wrap="square" lIns="0" tIns="0" rIns="0" bIns="0" rtlCol="0" anchor="ctr"/>
           <a:lstStyle/>
           <a:p>
-            <a:pPr algn="ctr" indent="0" marL="0">
+            <a:pPr eaLnBrk="0" algn="ctr" indent="0" marL="0">
               <a:buNone/>
             </a:pPr>
             <a:r>
@@ -9587,7 +9587,7 @@
           <a:bodyPr wrap="square" lIns="0" tIns="0" rIns="0" bIns="0" rtlCol="0" anchor="ctr"/>
           <a:lstStyle/>
           <a:p>
-            <a:pPr algn="l" indent="0" marL="0">
+            <a:pPr eaLnBrk="0" algn="l" indent="0" marL="0">
               <a:buNone/>
             </a:pPr>
             <a:r>
@@ -9634,7 +9634,7 @@
           <a:bodyPr wrap="square" lIns="0" tIns="0" rIns="0" bIns="0" rtlCol="0" anchor="ctr"/>
           <a:lstStyle/>
           <a:p>
-            <a:pPr algn="ctr" indent="0" marL="0">
+            <a:pPr eaLnBrk="0" algn="ctr" indent="0" marL="0">
               <a:buNone/>
             </a:pPr>
             <a:r>
@@ -9673,7 +9673,7 @@
           <a:bodyPr wrap="square" lIns="0" tIns="0" rIns="0" bIns="0" rtlCol="0" anchor="ctr"/>
           <a:lstStyle/>
           <a:p>
-            <a:pPr algn="l" indent="0" marL="0">
+            <a:pPr eaLnBrk="0" algn="l" indent="0" marL="0">
               <a:buNone/>
             </a:pPr>
             <a:r>
@@ -9730,7 +9730,7 @@
             </a:lvl1pPr>
           </a:lstStyle>
           <a:p>
-            <a:pPr algn="r"/>
+            <a:pPr eaLnBrk="0" algn="r"/>
             <a:fld id="{F7021451-1387-4CA6-816F-3879F97B5CBC}" type="slidenum">
               <a:rPr b="0" lang="en-US"/>
               <a:t>8</a:t>
@@ -9787,7 +9787,7 @@
           <a:bodyPr wrap="square" lIns="0" tIns="0" rIns="0" bIns="0" rtlCol="0" anchor="ctr"/>
           <a:lstStyle/>
           <a:p>
-            <a:pPr algn="l" indent="0" marL="0">
+            <a:pPr eaLnBrk="0" algn="l" indent="0" marL="0">
               <a:buNone/>
             </a:pPr>
             <a:r>
@@ -9853,7 +9853,7 @@
           <a:bodyPr wrap="square" lIns="0" tIns="0" rIns="0" bIns="0" rtlCol="0" anchor="ctr"/>
           <a:lstStyle/>
           <a:p>
-            <a:pPr indent="0" marL="0">
+            <a:pPr eaLnBrk="0" indent="0" marL="0">
               <a:spcAft>
                 <a:spcPts val="600"/>
               </a:spcAft>
@@ -9873,7 +9873,7 @@
             <a:endParaRPr lang="ko-KR" sz="3200" dirty="0"/>
           </a:p>
           <a:p>
-            <a:pPr indent="0" marL="0">
+            <a:pPr eaLnBrk="0" indent="0" marL="0">
               <a:spcAft>
                 <a:spcPts val="600"/>
               </a:spcAft>
@@ -9942,7 +9942,7 @@
           <a:bodyPr wrap="square" lIns="0" tIns="0" rIns="0" bIns="0" rtlCol="0" anchor="ctr"/>
           <a:lstStyle/>
           <a:p>
-            <a:pPr indent="0" marL="0">
+            <a:pPr eaLnBrk="0" indent="0" marL="0">
               <a:spcAft>
                 <a:spcPts val="600"/>
               </a:spcAft>
@@ -9992,7 +9992,7 @@
           <a:bodyPr wrap="square" lIns="177800" tIns="0" rIns="177800" bIns="0" rtlCol="0" anchor="ctr"/>
           <a:lstStyle/>
           <a:p>
-            <a:pPr algn="l" indent="0" marL="0">
+            <a:pPr eaLnBrk="0" algn="l" indent="0" marL="0">
               <a:buNone/>
             </a:pPr>
             <a:r>
@@ -10031,7 +10031,7 @@
           <a:bodyPr wrap="square" lIns="0" tIns="0" rIns="0" bIns="0" rtlCol="0" anchor="ctr"/>
           <a:lstStyle/>
           <a:p>
-            <a:pPr algn="ctr" indent="0" marL="0">
+            <a:pPr eaLnBrk="0" algn="ctr" indent="0" marL="0">
               <a:buNone/>
             </a:pPr>
             <a:r>
@@ -10078,7 +10078,7 @@
           <a:bodyPr wrap="square" lIns="177800" tIns="0" rIns="177800" bIns="0" rtlCol="0" anchor="ctr"/>
           <a:lstStyle/>
           <a:p>
-            <a:pPr algn="l" indent="0" marL="0">
+            <a:pPr eaLnBrk="0" algn="l" indent="0" marL="0">
               <a:buNone/>
             </a:pPr>
             <a:r>
@@ -10117,7 +10117,7 @@
           <a:bodyPr wrap="square" lIns="0" tIns="0" rIns="0" bIns="0" rtlCol="0" anchor="ctr"/>
           <a:lstStyle/>
           <a:p>
-            <a:pPr algn="ctr" indent="0" marL="0">
+            <a:pPr eaLnBrk="0" algn="ctr" indent="0" marL="0">
               <a:buNone/>
             </a:pPr>
             <a:r>
@@ -10174,7 +10174,7 @@
             </a:lvl1pPr>
           </a:lstStyle>
           <a:p>
-            <a:pPr algn="r"/>
+            <a:pPr eaLnBrk="0" algn="r"/>
             <a:fld id="{F7021451-1387-4CA6-816F-3879F97B5CBC}" type="slidenum">
               <a:rPr b="0" lang="en-US"/>
               <a:t>9</a:t>

--- a/dist/초1/수학/수와연산/초1_수학_수와연산_05_뺄셈의뜻_학생용.pptx
+++ b/dist/초1/수학/수와연산/초1_수학_수와연산_05_뺄셈의뜻_학생용.pptx
@@ -119,13 +119,13 @@
   <p:extLst>
     <p:ext uri="{521415D9-36F7-43E2-AB2F-B90AF26B5E84}">
       <p14:sectionLst xmlns:p14="http://schemas.microsoft.com/office/powerpoint/2010/main">
-        <p14:section name="도입" id="{4b861878-90c6-78bf-daff-9bf53692663a}">
+        <p14:section name="도입" id="{0a859987-7559-7f1d-45ac-03b2c3a11b65}">
           <p14:sldIdLst>
             <p14:sldId id="256"/>
             <p14:sldId id="257"/>
           </p14:sldIdLst>
         </p14:section>
-        <p14:section name="개념" id="{1131476b-e2c3-a6a3-0383-99c34712e8e8}">
+        <p14:section name="개념" id="{f9c492cc-54f7-2e31-5337-a93099f662c4}">
           <p14:sldIdLst>
             <p14:sldId id="258"/>
             <p14:sldId id="259"/>
@@ -133,25 +133,25 @@
             <p14:sldId id="261"/>
           </p14:sldIdLst>
         </p14:section>
-        <p14:section name="연습" id="{7ea223b8-e4a7-6a97-60ad-e6a03b313859}">
+        <p14:section name="연습" id="{d4907b4e-76f8-545d-e9ef-ad649be5e236}">
           <p14:sldIdLst>
             <p14:sldId id="262"/>
             <p14:sldId id="263"/>
             <p14:sldId id="264"/>
           </p14:sldIdLst>
         </p14:section>
-        <p14:section name="확인" id="{8a7dcaed-977c-a942-099a-9447a6c242fc}">
+        <p14:section name="확인" id="{8087a4a7-7209-85dd-80ce-6ac8efd2b1c1}">
           <p14:sldIdLst>
             <p14:sldId id="265"/>
             <p14:sldId id="266"/>
           </p14:sldIdLst>
         </p14:section>
-        <p14:section name="정리" id="{44674033-dcba-0c4a-2f5b-a63dca7fecc8}">
+        <p14:section name="정리" id="{c45faf8b-a85c-6a60-02df-89db68419667}">
           <p14:sldIdLst>
             <p14:sldId id="267"/>
           </p14:sldIdLst>
         </p14:section>
-        <p14:section name="보충" id="{23a9045d-1819-658c-c588-fb6224eb36f1}">
+        <p14:section name="보충" id="{aecaf1a4-a5fa-3e34-9b70-82a8dcdbfe4f}">
           <p14:sldIdLst>
             <p14:sldId id="268"/>
           </p14:sldIdLst>
@@ -5824,7 +5824,7 @@
         </p:nvSpPr>
         <p:spPr>
           <a:xfrm>
-            <a:off x="548640" y="5157216"/>
+            <a:off x="548640" y="5180076"/>
             <a:ext cx="566928" cy="566928"/>
           </a:xfrm>
           <a:prstGeom prst="roundRect">
@@ -5872,7 +5872,7 @@
         <p:spPr>
           <a:xfrm>
             <a:off x="1344168" y="4709160"/>
-            <a:ext cx="4206240" cy="1463040"/>
+            <a:ext cx="5486400" cy="1508760"/>
           </a:xfrm>
           <a:prstGeom prst="rect">
             <a:avLst/>
@@ -5888,7 +5888,7 @@
               <a:buNone/>
             </a:pPr>
             <a:r>
-              <a:rPr lang="ko-KR" altLang="en-US" sz="2600" b="1" dirty="0">
+              <a:rPr lang="ko-KR" altLang="en-US" sz="3200" b="1" dirty="0">
                 <a:solidFill>
                   <a:srgbClr val="1F2937"/>
                 </a:solidFill>
@@ -5898,14 +5898,14 @@
               </a:rPr>
               <a:t>8</a:t>
             </a:r>
-            <a:endParaRPr lang="ko-KR" sz="2600" dirty="0"/>
+            <a:endParaRPr lang="ko-KR" sz="3200" dirty="0"/>
           </a:p>
           <a:p>
             <a:pPr eaLnBrk="0" algn="ctr" indent="0" marL="0">
               <a:buNone/>
             </a:pPr>
             <a:r>
-              <a:rPr lang="ko-KR" altLang="en-US" sz="2600" b="1" dirty="0">
+              <a:rPr lang="ko-KR" altLang="en-US" sz="3200" b="1" dirty="0">
                 <a:solidFill>
                   <a:srgbClr val="1F2937"/>
                 </a:solidFill>
@@ -5915,14 +5915,14 @@
               </a:rPr>
               <a:t>↙    ↘</a:t>
             </a:r>
-            <a:endParaRPr lang="ko-KR" sz="2600" dirty="0"/>
+            <a:endParaRPr lang="ko-KR" sz="3200" dirty="0"/>
           </a:p>
           <a:p>
             <a:pPr eaLnBrk="0" algn="ctr" indent="0" marL="0">
               <a:buNone/>
             </a:pPr>
             <a:r>
-              <a:rPr lang="ko-KR" altLang="en-US" sz="2600" b="1" dirty="0">
+              <a:rPr lang="ko-KR" altLang="en-US" sz="3200" b="1" dirty="0">
                 <a:solidFill>
                   <a:srgbClr val="1F2937"/>
                 </a:solidFill>
@@ -5932,7 +5932,7 @@
               </a:rPr>
               <a:t>5        □</a:t>
             </a:r>
-            <a:endParaRPr lang="ko-KR" sz="2600" dirty="0"/>
+            <a:endParaRPr lang="ko-KR" sz="3200" dirty="0"/>
           </a:p>
         </p:txBody>
       </p:sp>

--- a/dist/초1/수학/수와연산/초1_수학_수와연산_05_뺄셈의뜻_학생용.pptx
+++ b/dist/초1/수학/수와연산/초1_수학_수와연산_05_뺄셈의뜻_학생용.pptx
@@ -119,13 +119,13 @@
   <p:extLst>
     <p:ext uri="{521415D9-36F7-43E2-AB2F-B90AF26B5E84}">
       <p14:sectionLst xmlns:p14="http://schemas.microsoft.com/office/powerpoint/2010/main">
-        <p14:section name="도입" id="{0a859987-7559-7f1d-45ac-03b2c3a11b65}">
+        <p14:section name="도입" id="{5e858670-267f-d01c-5020-dd4c9ecfe39f}">
           <p14:sldIdLst>
             <p14:sldId id="256"/>
             <p14:sldId id="257"/>
           </p14:sldIdLst>
         </p14:section>
-        <p14:section name="개념" id="{f9c492cc-54f7-2e31-5337-a93099f662c4}">
+        <p14:section name="개념" id="{60d3bf8f-07de-e67e-6761-c32e1029990f}">
           <p14:sldIdLst>
             <p14:sldId id="258"/>
             <p14:sldId id="259"/>
@@ -133,25 +133,25 @@
             <p14:sldId id="261"/>
           </p14:sldIdLst>
         </p14:section>
-        <p14:section name="연습" id="{d4907b4e-76f8-545d-e9ef-ad649be5e236}">
+        <p14:section name="연습" id="{418c4732-fb3b-3970-8711-d24e51acc931}">
           <p14:sldIdLst>
             <p14:sldId id="262"/>
             <p14:sldId id="263"/>
             <p14:sldId id="264"/>
           </p14:sldIdLst>
         </p14:section>
-        <p14:section name="확인" id="{8087a4a7-7209-85dd-80ce-6ac8efd2b1c1}">
+        <p14:section name="확인" id="{c5262b4a-2697-4301-bea3-4769689e2898}">
           <p14:sldIdLst>
             <p14:sldId id="265"/>
             <p14:sldId id="266"/>
           </p14:sldIdLst>
         </p14:section>
-        <p14:section name="정리" id="{c45faf8b-a85c-6a60-02df-89db68419667}">
+        <p14:section name="정리" id="{9badaa84-e4b4-b46d-309f-7cd6e4f7a375}">
           <p14:sldIdLst>
             <p14:sldId id="267"/>
           </p14:sldIdLst>
         </p14:section>
-        <p14:section name="보충" id="{aecaf1a4-a5fa-3e34-9b70-82a8dcdbfe4f}">
+        <p14:section name="보충" id="{21c6947c-9931-b803-1484-616cfc1b89eb}">
           <p14:sldIdLst>
             <p14:sldId id="268"/>
           </p14:sldIdLst>
